--- a/小論文添削（ショー）/ワークシート/国士舘大学_文学部教育学科/国士舘大学_文学部教育学科_小論文ワークシート.pptx
+++ b/小論文添削（ショー）/ワークシート/国士舘大学_文学部教育学科/国士舘大学_文学部教育学科_小論文ワークシート.pptx
@@ -3408,7 +3408,7 @@
                 <a:latin typeface="游ゴシック"/>
                 <a:ea typeface="游ゴシック"/>
               </a:rPr>
-              <a:t>C3進学アカデミー　学習支援資料</a:t>
+              <a:t>個人指導塾PLATZ　学習支援資料</a:t>
             </a:r>
           </a:p>
         </p:txBody>
@@ -3658,7 +3658,7 @@
                 <a:latin typeface="游ゴシック"/>
                 <a:ea typeface="游ゴシック"/>
               </a:rPr>
-              <a:t>C3進学アカデミー　国士舘大学 文学部 教育学科 小論文ワークシート</a:t>
+              <a:t>個人指導塾PLATZ　国士舘大学 文学部 教育学科 小論文ワークシート</a:t>
             </a:r>
           </a:p>
         </p:txBody>
@@ -4644,7 +4644,7 @@
                 <a:latin typeface="游ゴシック"/>
                 <a:ea typeface="游ゴシック"/>
               </a:rPr>
-              <a:t>C3進学アカデミー　国士舘大学 文学部 教育学科 小論文ワークシート</a:t>
+              <a:t>個人指導塾PLATZ　国士舘大学 文学部 教育学科 小論文ワークシート</a:t>
             </a:r>
           </a:p>
         </p:txBody>
@@ -5644,7 +5644,7 @@
                 <a:latin typeface="游ゴシック"/>
                 <a:ea typeface="游ゴシック"/>
               </a:rPr>
-              <a:t>C3進学アカデミー　国士舘大学 文学部 教育学科 小論文ワークシート</a:t>
+              <a:t>個人指導塾PLATZ　国士舘大学 文学部 教育学科 小論文ワークシート</a:t>
             </a:r>
           </a:p>
         </p:txBody>
@@ -6720,7 +6720,7 @@
                 <a:latin typeface="游ゴシック"/>
                 <a:ea typeface="游ゴシック"/>
               </a:rPr>
-              <a:t>C3進学アカデミー　国士舘大学 文学部 教育学科 小論文ワークシート</a:t>
+              <a:t>個人指導塾PLATZ　国士舘大学 文学部 教育学科 小論文ワークシート</a:t>
             </a:r>
           </a:p>
         </p:txBody>
@@ -7886,7 +7886,7 @@
                 <a:latin typeface="游ゴシック"/>
                 <a:ea typeface="游ゴシック"/>
               </a:rPr>
-              <a:t>C3進学アカデミー　国士舘大学 文学部 教育学科 小論文ワークシート</a:t>
+              <a:t>個人指導塾PLATZ　国士舘大学 文学部 教育学科 小論文ワークシート</a:t>
             </a:r>
           </a:p>
         </p:txBody>
@@ -9148,7 +9148,7 @@
                 <a:latin typeface="游ゴシック"/>
                 <a:ea typeface="游ゴシック"/>
               </a:rPr>
-              <a:t>C3進学アカデミー　国士舘大学 文学部 教育学科 小論文ワークシート</a:t>
+              <a:t>個人指導塾PLATZ　国士舘大学 文学部 教育学科 小論文ワークシート</a:t>
             </a:r>
           </a:p>
         </p:txBody>
@@ -9990,7 +9990,7 @@
                 <a:latin typeface="游ゴシック"/>
                 <a:ea typeface="游ゴシック"/>
               </a:rPr>
-              <a:t>C3進学アカデミー　国士舘大学 文学部 教育学科 小論文ワークシート</a:t>
+              <a:t>個人指導塾PLATZ　国士舘大学 文学部 教育学科 小論文ワークシート</a:t>
             </a:r>
           </a:p>
         </p:txBody>
@@ -11008,7 +11008,7 @@
                 <a:latin typeface="游ゴシック"/>
                 <a:ea typeface="游ゴシック"/>
               </a:rPr>
-              <a:t>C3進学アカデミー　国士舘大学 文学部 教育学科 小論文ワークシート</a:t>
+              <a:t>個人指導塾PLATZ　国士舘大学 文学部 教育学科 小論文ワークシート</a:t>
             </a:r>
           </a:p>
         </p:txBody>
@@ -11762,7 +11762,7 @@
                 <a:latin typeface="游ゴシック"/>
                 <a:ea typeface="游ゴシック"/>
               </a:rPr>
-              <a:t>C3進学アカデミー　国士舘大学 文学部 教育学科 小論文ワークシート</a:t>
+              <a:t>個人指導塾PLATZ　国士舘大学 文学部 教育学科 小論文ワークシート</a:t>
             </a:r>
           </a:p>
         </p:txBody>
@@ -13260,7 +13260,7 @@
                 <a:latin typeface="游ゴシック"/>
                 <a:ea typeface="游ゴシック"/>
               </a:rPr>
-              <a:t>C3進学アカデミー　国士舘大学 文学部 教育学科 小論文ワークシート</a:t>
+              <a:t>個人指導塾PLATZ　国士舘大学 文学部 教育学科 小論文ワークシート</a:t>
             </a:r>
           </a:p>
         </p:txBody>
@@ -14250,7 +14250,7 @@
                 <a:latin typeface="游ゴシック"/>
                 <a:ea typeface="游ゴシック"/>
               </a:rPr>
-              <a:t>C3進学アカデミー　国士舘大学 文学部 教育学科 小論文ワークシート</a:t>
+              <a:t>個人指導塾PLATZ　国士舘大学 文学部 教育学科 小論文ワークシート</a:t>
             </a:r>
           </a:p>
         </p:txBody>
@@ -15448,7 +15448,7 @@
                 <a:latin typeface="游ゴシック"/>
                 <a:ea typeface="游ゴシック"/>
               </a:rPr>
-              <a:t>C3進学アカデミー　国士舘大学 文学部 教育学科 小論文ワークシート</a:t>
+              <a:t>個人指導塾PLATZ　国士舘大学 文学部 教育学科 小論文ワークシート</a:t>
             </a:r>
           </a:p>
         </p:txBody>
@@ -16236,7 +16236,7 @@
                 <a:latin typeface="游ゴシック"/>
                 <a:ea typeface="游ゴシック"/>
               </a:rPr>
-              <a:t>C3進学アカデミー　国士舘大学 文学部 教育学科 小論文ワークシート</a:t>
+              <a:t>個人指導塾PLATZ　国士舘大学 文学部 教育学科 小論文ワークシート</a:t>
             </a:r>
           </a:p>
         </p:txBody>
@@ -17740,7 +17740,7 @@
                 <a:latin typeface="游ゴシック"/>
                 <a:ea typeface="游ゴシック"/>
               </a:rPr>
-              <a:t>C3進学アカデミー　国士舘大学 文学部 教育学科 小論文ワークシート</a:t>
+              <a:t>個人指導塾PLATZ　国士舘大学 文学部 教育学科 小論文ワークシート</a:t>
             </a:r>
           </a:p>
         </p:txBody>
@@ -19634,7 +19634,7 @@
                 <a:latin typeface="游ゴシック"/>
                 <a:ea typeface="游ゴシック"/>
               </a:rPr>
-              <a:t>C3進学アカデミー　国士舘大学 文学部 教育学科 小論文ワークシート</a:t>
+              <a:t>個人指導塾PLATZ　国士舘大学 文学部 教育学科 小論文ワークシート</a:t>
             </a:r>
           </a:p>
         </p:txBody>
